--- a/presentation/vesper/vesper_deck.pptx
+++ b/presentation/vesper/vesper_deck.pptx
@@ -14,6 +14,7 @@
     <p:sldId id="262" r:id="rId13"/>
     <p:sldId id="263" r:id="rId14"/>
     <p:sldId id="264" r:id="rId15"/>
+    <p:sldId id="265" r:id="rId16"/>
   </p:sldIdLst>
   <p:sldSz cx="12192000" cy="7620000" type="screen4x3"/>
   <p:notesSz cx="6858000" cy="9144000"/>
@@ -3099,6 +3100,48 @@
       <p:pic>
         <p:nvPicPr>
           <p:cNvPr id="2" name="Picture 1" descr="slide_01.jpg"/>
+          <p:cNvPicPr>
+            <a:picLocks noChangeAspect="1"/>
+          </p:cNvPicPr>
+          <p:nvPr/>
+        </p:nvPicPr>
+        <p:blipFill>
+          <a:blip r:embed="rId2"/>
+          <a:stretch>
+            <a:fillRect/>
+          </a:stretch>
+        </p:blipFill>
+        <p:spPr>
+          <a:xfrm>
+            <a:off x="0" y="0"/>
+            <a:ext cx="12192000" cy="7620000"/>
+          </a:xfrm>
+          <a:prstGeom prst="rect">
+            <a:avLst/>
+          </a:prstGeom>
+        </p:spPr>
+      </p:pic>
+    </p:spTree>
+  </p:cSld>
+  <p:clrMapOvr>
+    <a:masterClrMapping/>
+  </p:clrMapOvr>
+</p:sld>
+</file>
+
+<file path=ppt/slides/slide10.xml><?xml version="1.0" encoding="utf-8"?>
+<p:sld xmlns:a="http://schemas.openxmlformats.org/drawingml/2006/main" xmlns:p="http://schemas.openxmlformats.org/presentationml/2006/main" xmlns:r="http://schemas.openxmlformats.org/officeDocument/2006/relationships">
+  <p:cSld>
+    <p:spTree>
+      <p:nvGrpSpPr>
+        <p:cNvPr id="1" name=""/>
+        <p:cNvGrpSpPr/>
+        <p:nvPr/>
+      </p:nvGrpSpPr>
+      <p:grpSpPr/>
+      <p:pic>
+        <p:nvPicPr>
+          <p:cNvPr id="2" name="Picture 1" descr="slide_10.jpg"/>
           <p:cNvPicPr>
             <a:picLocks noChangeAspect="1"/>
           </p:cNvPicPr>

--- a/presentation/vesper/vesper_deck.pptx
+++ b/presentation/vesper/vesper_deck.pptx
@@ -11,10 +11,6 @@
     <p:sldId id="259" r:id="rId10"/>
     <p:sldId id="260" r:id="rId11"/>
     <p:sldId id="261" r:id="rId12"/>
-    <p:sldId id="262" r:id="rId13"/>
-    <p:sldId id="263" r:id="rId14"/>
-    <p:sldId id="264" r:id="rId15"/>
-    <p:sldId id="265" r:id="rId16"/>
   </p:sldIdLst>
   <p:sldSz cx="12192000" cy="7620000" type="screen4x3"/>
   <p:notesSz cx="6858000" cy="9144000"/>
@@ -3129,48 +3125,6 @@
 </p:sld>
 </file>
 
-<file path=ppt/slides/slide10.xml><?xml version="1.0" encoding="utf-8"?>
-<p:sld xmlns:a="http://schemas.openxmlformats.org/drawingml/2006/main" xmlns:p="http://schemas.openxmlformats.org/presentationml/2006/main" xmlns:r="http://schemas.openxmlformats.org/officeDocument/2006/relationships">
-  <p:cSld>
-    <p:spTree>
-      <p:nvGrpSpPr>
-        <p:cNvPr id="1" name=""/>
-        <p:cNvGrpSpPr/>
-        <p:nvPr/>
-      </p:nvGrpSpPr>
-      <p:grpSpPr/>
-      <p:pic>
-        <p:nvPicPr>
-          <p:cNvPr id="2" name="Picture 1" descr="slide_10.jpg"/>
-          <p:cNvPicPr>
-            <a:picLocks noChangeAspect="1"/>
-          </p:cNvPicPr>
-          <p:nvPr/>
-        </p:nvPicPr>
-        <p:blipFill>
-          <a:blip r:embed="rId2"/>
-          <a:stretch>
-            <a:fillRect/>
-          </a:stretch>
-        </p:blipFill>
-        <p:spPr>
-          <a:xfrm>
-            <a:off x="0" y="0"/>
-            <a:ext cx="12192000" cy="7620000"/>
-          </a:xfrm>
-          <a:prstGeom prst="rect">
-            <a:avLst/>
-          </a:prstGeom>
-        </p:spPr>
-      </p:pic>
-    </p:spTree>
-  </p:cSld>
-  <p:clrMapOvr>
-    <a:masterClrMapping/>
-  </p:clrMapOvr>
-</p:sld>
-</file>
-
 <file path=ppt/slides/slide2.xml><?xml version="1.0" encoding="utf-8"?>
 <p:sld xmlns:a="http://schemas.openxmlformats.org/drawingml/2006/main" xmlns:p="http://schemas.openxmlformats.org/presentationml/2006/main" xmlns:r="http://schemas.openxmlformats.org/officeDocument/2006/relationships">
   <p:cSld>
@@ -3352,132 +3306,6 @@
       <p:pic>
         <p:nvPicPr>
           <p:cNvPr id="2" name="Picture 1" descr="slide_06.jpg"/>
-          <p:cNvPicPr>
-            <a:picLocks noChangeAspect="1"/>
-          </p:cNvPicPr>
-          <p:nvPr/>
-        </p:nvPicPr>
-        <p:blipFill>
-          <a:blip r:embed="rId2"/>
-          <a:stretch>
-            <a:fillRect/>
-          </a:stretch>
-        </p:blipFill>
-        <p:spPr>
-          <a:xfrm>
-            <a:off x="0" y="0"/>
-            <a:ext cx="12192000" cy="7620000"/>
-          </a:xfrm>
-          <a:prstGeom prst="rect">
-            <a:avLst/>
-          </a:prstGeom>
-        </p:spPr>
-      </p:pic>
-    </p:spTree>
-  </p:cSld>
-  <p:clrMapOvr>
-    <a:masterClrMapping/>
-  </p:clrMapOvr>
-</p:sld>
-</file>
-
-<file path=ppt/slides/slide7.xml><?xml version="1.0" encoding="utf-8"?>
-<p:sld xmlns:a="http://schemas.openxmlformats.org/drawingml/2006/main" xmlns:p="http://schemas.openxmlformats.org/presentationml/2006/main" xmlns:r="http://schemas.openxmlformats.org/officeDocument/2006/relationships">
-  <p:cSld>
-    <p:spTree>
-      <p:nvGrpSpPr>
-        <p:cNvPr id="1" name=""/>
-        <p:cNvGrpSpPr/>
-        <p:nvPr/>
-      </p:nvGrpSpPr>
-      <p:grpSpPr/>
-      <p:pic>
-        <p:nvPicPr>
-          <p:cNvPr id="2" name="Picture 1" descr="slide_07.jpg"/>
-          <p:cNvPicPr>
-            <a:picLocks noChangeAspect="1"/>
-          </p:cNvPicPr>
-          <p:nvPr/>
-        </p:nvPicPr>
-        <p:blipFill>
-          <a:blip r:embed="rId2"/>
-          <a:stretch>
-            <a:fillRect/>
-          </a:stretch>
-        </p:blipFill>
-        <p:spPr>
-          <a:xfrm>
-            <a:off x="0" y="0"/>
-            <a:ext cx="12192000" cy="7620000"/>
-          </a:xfrm>
-          <a:prstGeom prst="rect">
-            <a:avLst/>
-          </a:prstGeom>
-        </p:spPr>
-      </p:pic>
-    </p:spTree>
-  </p:cSld>
-  <p:clrMapOvr>
-    <a:masterClrMapping/>
-  </p:clrMapOvr>
-</p:sld>
-</file>
-
-<file path=ppt/slides/slide8.xml><?xml version="1.0" encoding="utf-8"?>
-<p:sld xmlns:a="http://schemas.openxmlformats.org/drawingml/2006/main" xmlns:p="http://schemas.openxmlformats.org/presentationml/2006/main" xmlns:r="http://schemas.openxmlformats.org/officeDocument/2006/relationships">
-  <p:cSld>
-    <p:spTree>
-      <p:nvGrpSpPr>
-        <p:cNvPr id="1" name=""/>
-        <p:cNvGrpSpPr/>
-        <p:nvPr/>
-      </p:nvGrpSpPr>
-      <p:grpSpPr/>
-      <p:pic>
-        <p:nvPicPr>
-          <p:cNvPr id="2" name="Picture 1" descr="slide_08.jpg"/>
-          <p:cNvPicPr>
-            <a:picLocks noChangeAspect="1"/>
-          </p:cNvPicPr>
-          <p:nvPr/>
-        </p:nvPicPr>
-        <p:blipFill>
-          <a:blip r:embed="rId2"/>
-          <a:stretch>
-            <a:fillRect/>
-          </a:stretch>
-        </p:blipFill>
-        <p:spPr>
-          <a:xfrm>
-            <a:off x="0" y="0"/>
-            <a:ext cx="12192000" cy="7620000"/>
-          </a:xfrm>
-          <a:prstGeom prst="rect">
-            <a:avLst/>
-          </a:prstGeom>
-        </p:spPr>
-      </p:pic>
-    </p:spTree>
-  </p:cSld>
-  <p:clrMapOvr>
-    <a:masterClrMapping/>
-  </p:clrMapOvr>
-</p:sld>
-</file>
-
-<file path=ppt/slides/slide9.xml><?xml version="1.0" encoding="utf-8"?>
-<p:sld xmlns:a="http://schemas.openxmlformats.org/drawingml/2006/main" xmlns:p="http://schemas.openxmlformats.org/presentationml/2006/main" xmlns:r="http://schemas.openxmlformats.org/officeDocument/2006/relationships">
-  <p:cSld>
-    <p:spTree>
-      <p:nvGrpSpPr>
-        <p:cNvPr id="1" name=""/>
-        <p:cNvGrpSpPr/>
-        <p:nvPr/>
-      </p:nvGrpSpPr>
-      <p:grpSpPr/>
-      <p:pic>
-        <p:nvPicPr>
-          <p:cNvPr id="2" name="Picture 1" descr="slide_09.jpg"/>
           <p:cNvPicPr>
             <a:picLocks noChangeAspect="1"/>
           </p:cNvPicPr>

--- a/presentation/vesper/vesper_deck.pptx
+++ b/presentation/vesper/vesper_deck.pptx
@@ -11,6 +11,7 @@
     <p:sldId id="259" r:id="rId10"/>
     <p:sldId id="260" r:id="rId11"/>
     <p:sldId id="261" r:id="rId12"/>
+    <p:sldId id="262" r:id="rId13"/>
   </p:sldIdLst>
   <p:sldSz cx="12192000" cy="7620000" type="screen4x3"/>
   <p:notesSz cx="6858000" cy="9144000"/>
@@ -3335,6 +3336,48 @@
 </p:sld>
 </file>
 
+<file path=ppt/slides/slide7.xml><?xml version="1.0" encoding="utf-8"?>
+<p:sld xmlns:a="http://schemas.openxmlformats.org/drawingml/2006/main" xmlns:p="http://schemas.openxmlformats.org/presentationml/2006/main" xmlns:r="http://schemas.openxmlformats.org/officeDocument/2006/relationships">
+  <p:cSld>
+    <p:spTree>
+      <p:nvGrpSpPr>
+        <p:cNvPr id="1" name=""/>
+        <p:cNvGrpSpPr/>
+        <p:nvPr/>
+      </p:nvGrpSpPr>
+      <p:grpSpPr/>
+      <p:pic>
+        <p:nvPicPr>
+          <p:cNvPr id="2" name="Picture 1" descr="slide_07.jpg"/>
+          <p:cNvPicPr>
+            <a:picLocks noChangeAspect="1"/>
+          </p:cNvPicPr>
+          <p:nvPr/>
+        </p:nvPicPr>
+        <p:blipFill>
+          <a:blip r:embed="rId2"/>
+          <a:stretch>
+            <a:fillRect/>
+          </a:stretch>
+        </p:blipFill>
+        <p:spPr>
+          <a:xfrm>
+            <a:off x="0" y="0"/>
+            <a:ext cx="12192000" cy="7620000"/>
+          </a:xfrm>
+          <a:prstGeom prst="rect">
+            <a:avLst/>
+          </a:prstGeom>
+        </p:spPr>
+      </p:pic>
+    </p:spTree>
+  </p:cSld>
+  <p:clrMapOvr>
+    <a:masterClrMapping/>
+  </p:clrMapOvr>
+</p:sld>
+</file>
+
 <file path=ppt/theme/theme1.xml><?xml version="1.0" encoding="utf-8"?>
 <a:theme xmlns:a="http://schemas.openxmlformats.org/drawingml/2006/main" name="Office Theme">
   <a:themeElements>
